--- a/skills/presentation-template-library/skills/artifact-template-rice-paper-yearbook/assets/reference.pptx
+++ b/skills/presentation-template-library/skills/artifact-template-rice-paper-yearbook/assets/reference.pptx
@@ -1778,492 +1778,16 @@
           </a:p>
         </p:txBody>
       </p:sp>
-      <p:graphicFrame>
-        <p:nvGraphicFramePr>
-          <p:cNvPr id="8" name="finance-evidence-table"/>
-          <p:cNvGraphicFramePr>
-            <a:graphicFrameLocks xmlns:a="http://schemas.openxmlformats.org/drawingml/2006/main" noGrp="1"/>
-          </p:cNvGraphicFramePr>
-          <p:nvPr/>
-        </p:nvGraphicFramePr>
-        <p:xfrm>
-          <a:off xmlns:a="http://schemas.openxmlformats.org/drawingml/2006/main" x="990600" y="3162300"/>
-          <a:ext xmlns:a="http://schemas.openxmlformats.org/drawingml/2006/main" cx="8001000" cy="2895600"/>
-        </p:xfrm>
-        <a:graphic xmlns:a="http://schemas.openxmlformats.org/drawingml/2006/main">
-          <a:graphicData uri="http://schemas.openxmlformats.org/drawingml/2006/table">
-            <a:tbl>
-              <a:tblPr firstRow="1"/>
-              <a:tblGrid>
-                <a:gridCol w="2000250"/>
-                <a:gridCol w="2000250"/>
-                <a:gridCol w="2000250"/>
-                <a:gridCol w="2000250"/>
-              </a:tblGrid>
-              <a:tr h="579120">
-                <a:tc>
-                  <a:txBody>
-                    <a:bodyPr/>
-                    <a:lstStyle/>
-                    <a:p>
-                      <a:r>
-                        <a:rPr lang="en-US" sz="1350" b="1">
-                          <a:solidFill>
-                            <a:srgbClr val="000000"/>
-                          </a:solidFill>
-                        </a:rPr>
-                        <a:t>Metric</a:t>
-                      </a:r>
-                      <a:endParaRPr lang="en-US" sz="1350"/>
-                    </a:p>
-                  </a:txBody>
-                  <a:tcPr>
-                    <a:solidFill>
-                      <a:srgbClr val="EDEDED"/>
-                    </a:solidFill>
-                  </a:tcPr>
-                </a:tc>
-                <a:tc>
-                  <a:txBody>
-                    <a:bodyPr/>
-                    <a:lstStyle/>
-                    <a:p>
-                      <a:r>
-                        <a:rPr lang="en-US" sz="1350" b="1">
-                          <a:solidFill>
-                            <a:srgbClr val="000000"/>
-                          </a:solidFill>
-                        </a:rPr>
-                        <a:t>Base</a:t>
-                      </a:r>
-                      <a:endParaRPr lang="en-US" sz="1350"/>
-                    </a:p>
-                  </a:txBody>
-                  <a:tcPr>
-                    <a:solidFill>
-                      <a:srgbClr val="EDEDED"/>
-                    </a:solidFill>
-                  </a:tcPr>
-                </a:tc>
-                <a:tc>
-                  <a:txBody>
-                    <a:bodyPr/>
-                    <a:lstStyle/>
-                    <a:p>
-                      <a:r>
-                        <a:rPr lang="en-US" sz="1350" b="1">
-                          <a:solidFill>
-                            <a:srgbClr val="000000"/>
-                          </a:solidFill>
-                        </a:rPr>
-                        <a:t>Plan</a:t>
-                      </a:r>
-                      <a:endParaRPr lang="en-US" sz="1350"/>
-                    </a:p>
-                  </a:txBody>
-                  <a:tcPr>
-                    <a:solidFill>
-                      <a:srgbClr val="EDEDED"/>
-                    </a:solidFill>
-                  </a:tcPr>
-                </a:tc>
-                <a:tc>
-                  <a:txBody>
-                    <a:bodyPr/>
-                    <a:lstStyle/>
-                    <a:p>
-                      <a:r>
-                        <a:rPr lang="en-US" sz="1350" b="1">
-                          <a:solidFill>
-                            <a:srgbClr val="000000"/>
-                          </a:solidFill>
-                        </a:rPr>
-                        <a:t>Delta</a:t>
-                      </a:r>
-                      <a:endParaRPr lang="en-US" sz="1350"/>
-                    </a:p>
-                  </a:txBody>
-                  <a:tcPr>
-                    <a:solidFill>
-                      <a:srgbClr val="EDEDED"/>
-                    </a:solidFill>
-                  </a:tcPr>
-                </a:tc>
-              </a:tr>
-              <a:tr h="579120">
-                <a:tc>
-                  <a:txBody>
-                    <a:bodyPr/>
-                    <a:lstStyle/>
-                    <a:p>
-                      <a:r>
-                        <a:rPr lang="en-US" sz="1350" b="0">
-                          <a:solidFill>
-                            <a:srgbClr val="0F172A"/>
-                          </a:solidFill>
-                        </a:rPr>
-                        <a:t>Coverage</a:t>
-                      </a:r>
-                      <a:endParaRPr lang="en-US" sz="1350"/>
-                    </a:p>
-                  </a:txBody>
-                  <a:tcPr>
-                    <a:solidFill>
-                      <a:srgbClr val="FFFFFF"/>
-                    </a:solidFill>
-                  </a:tcPr>
-                </a:tc>
-                <a:tc>
-                  <a:txBody>
-                    <a:bodyPr/>
-                    <a:lstStyle/>
-                    <a:p>
-                      <a:r>
-                        <a:rPr lang="en-US" sz="1350" b="0">
-                          <a:solidFill>
-                            <a:srgbClr val="0F172A"/>
-                          </a:solidFill>
-                        </a:rPr>
-                        <a:t>42</a:t>
-                      </a:r>
-                      <a:endParaRPr lang="en-US" sz="1350"/>
-                    </a:p>
-                  </a:txBody>
-                  <a:tcPr>
-                    <a:solidFill>
-                      <a:srgbClr val="FFFFFF"/>
-                    </a:solidFill>
-                  </a:tcPr>
-                </a:tc>
-                <a:tc>
-                  <a:txBody>
-                    <a:bodyPr/>
-                    <a:lstStyle/>
-                    <a:p>
-                      <a:r>
-                        <a:rPr lang="en-US" sz="1350" b="0">
-                          <a:solidFill>
-                            <a:srgbClr val="0F172A"/>
-                          </a:solidFill>
-                        </a:rPr>
-                        <a:t>51</a:t>
-                      </a:r>
-                      <a:endParaRPr lang="en-US" sz="1350"/>
-                    </a:p>
-                  </a:txBody>
-                  <a:tcPr>
-                    <a:solidFill>
-                      <a:srgbClr val="FFFFFF"/>
-                    </a:solidFill>
-                  </a:tcPr>
-                </a:tc>
-                <a:tc>
-                  <a:txBody>
-                    <a:bodyPr/>
-                    <a:lstStyle/>
-                    <a:p>
-                      <a:r>
-                        <a:rPr lang="en-US" sz="1350" b="0">
-                          <a:solidFill>
-                            <a:srgbClr val="0F172A"/>
-                          </a:solidFill>
-                        </a:rPr>
-                        <a:t>+9</a:t>
-                      </a:r>
-                      <a:endParaRPr lang="en-US" sz="1350"/>
-                    </a:p>
-                  </a:txBody>
-                  <a:tcPr>
-                    <a:solidFill>
-                      <a:srgbClr val="FFFFFF"/>
-                    </a:solidFill>
-                  </a:tcPr>
-                </a:tc>
-              </a:tr>
-              <a:tr h="579120">
-                <a:tc>
-                  <a:txBody>
-                    <a:bodyPr/>
-                    <a:lstStyle/>
-                    <a:p>
-                      <a:r>
-                        <a:rPr lang="en-US" sz="1350" b="0">
-                          <a:solidFill>
-                            <a:srgbClr val="0F172A"/>
-                          </a:solidFill>
-                        </a:rPr>
-                        <a:t>Cash conversion</a:t>
-                      </a:r>
-                      <a:endParaRPr lang="en-US" sz="1350"/>
-                    </a:p>
-                  </a:txBody>
-                  <a:tcPr>
-                    <a:solidFill>
-                      <a:srgbClr val="FFFFFF"/>
-                    </a:solidFill>
-                  </a:tcPr>
-                </a:tc>
-                <a:tc>
-                  <a:txBody>
-                    <a:bodyPr/>
-                    <a:lstStyle/>
-                    <a:p>
-                      <a:r>
-                        <a:rPr lang="en-US" sz="1350" b="0">
-                          <a:solidFill>
-                            <a:srgbClr val="0F172A"/>
-                          </a:solidFill>
-                        </a:rPr>
-                        <a:t>1.6x</a:t>
-                      </a:r>
-                      <a:endParaRPr lang="en-US" sz="1350"/>
-                    </a:p>
-                  </a:txBody>
-                  <a:tcPr>
-                    <a:solidFill>
-                      <a:srgbClr val="FFFFFF"/>
-                    </a:solidFill>
-                  </a:tcPr>
-                </a:tc>
-                <a:tc>
-                  <a:txBody>
-                    <a:bodyPr/>
-                    <a:lstStyle/>
-                    <a:p>
-                      <a:r>
-                        <a:rPr lang="en-US" sz="1350" b="0">
-                          <a:solidFill>
-                            <a:srgbClr val="0F172A"/>
-                          </a:solidFill>
-                        </a:rPr>
-                        <a:t>2.1x</a:t>
-                      </a:r>
-                      <a:endParaRPr lang="en-US" sz="1350"/>
-                    </a:p>
-                  </a:txBody>
-                  <a:tcPr>
-                    <a:solidFill>
-                      <a:srgbClr val="FFFFFF"/>
-                    </a:solidFill>
-                  </a:tcPr>
-                </a:tc>
-                <a:tc>
-                  <a:txBody>
-                    <a:bodyPr/>
-                    <a:lstStyle/>
-                    <a:p>
-                      <a:r>
-                        <a:rPr lang="en-US" sz="1350" b="0">
-                          <a:solidFill>
-                            <a:srgbClr val="0F172A"/>
-                          </a:solidFill>
-                        </a:rPr>
-                        <a:t>+0.5x</a:t>
-                      </a:r>
-                      <a:endParaRPr lang="en-US" sz="1350"/>
-                    </a:p>
-                  </a:txBody>
-                  <a:tcPr>
-                    <a:solidFill>
-                      <a:srgbClr val="FFFFFF"/>
-                    </a:solidFill>
-                  </a:tcPr>
-                </a:tc>
-              </a:tr>
-              <a:tr h="579120">
-                <a:tc>
-                  <a:txBody>
-                    <a:bodyPr/>
-                    <a:lstStyle/>
-                    <a:p>
-                      <a:r>
-                        <a:rPr lang="en-US" sz="1350" b="0">
-                          <a:solidFill>
-                            <a:srgbClr val="0F172A"/>
-                          </a:solidFill>
-                        </a:rPr>
-                        <a:t>Risk buffer</a:t>
-                      </a:r>
-                      <a:endParaRPr lang="en-US" sz="1350"/>
-                    </a:p>
-                  </a:txBody>
-                  <a:tcPr>
-                    <a:solidFill>
-                      <a:srgbClr val="FFFFFF"/>
-                    </a:solidFill>
-                  </a:tcPr>
-                </a:tc>
-                <a:tc>
-                  <a:txBody>
-                    <a:bodyPr/>
-                    <a:lstStyle/>
-                    <a:p>
-                      <a:r>
-                        <a:rPr lang="en-US" sz="1350" b="0">
-                          <a:solidFill>
-                            <a:srgbClr val="0F172A"/>
-                          </a:solidFill>
-                        </a:rPr>
-                        <a:t>8w</a:t>
-                      </a:r>
-                      <a:endParaRPr lang="en-US" sz="1350"/>
-                    </a:p>
-                  </a:txBody>
-                  <a:tcPr>
-                    <a:solidFill>
-                      <a:srgbClr val="FFFFFF"/>
-                    </a:solidFill>
-                  </a:tcPr>
-                </a:tc>
-                <a:tc>
-                  <a:txBody>
-                    <a:bodyPr/>
-                    <a:lstStyle/>
-                    <a:p>
-                      <a:r>
-                        <a:rPr lang="en-US" sz="1350" b="0">
-                          <a:solidFill>
-                            <a:srgbClr val="0F172A"/>
-                          </a:solidFill>
-                        </a:rPr>
-                        <a:t>10w</a:t>
-                      </a:r>
-                      <a:endParaRPr lang="en-US" sz="1350"/>
-                    </a:p>
-                  </a:txBody>
-                  <a:tcPr>
-                    <a:solidFill>
-                      <a:srgbClr val="FFFFFF"/>
-                    </a:solidFill>
-                  </a:tcPr>
-                </a:tc>
-                <a:tc>
-                  <a:txBody>
-                    <a:bodyPr/>
-                    <a:lstStyle/>
-                    <a:p>
-                      <a:r>
-                        <a:rPr lang="en-US" sz="1350" b="0">
-                          <a:solidFill>
-                            <a:srgbClr val="0F172A"/>
-                          </a:solidFill>
-                        </a:rPr>
-                        <a:t>+2w</a:t>
-                      </a:r>
-                      <a:endParaRPr lang="en-US" sz="1350"/>
-                    </a:p>
-                  </a:txBody>
-                  <a:tcPr>
-                    <a:solidFill>
-                      <a:srgbClr val="FFFFFF"/>
-                    </a:solidFill>
-                  </a:tcPr>
-                </a:tc>
-              </a:tr>
-              <a:tr h="579120">
-                <a:tc>
-                  <a:txBody>
-                    <a:bodyPr/>
-                    <a:lstStyle/>
-                    <a:p>
-                      <a:r>
-                        <a:rPr lang="en-US" sz="1350" b="0">
-                          <a:solidFill>
-                            <a:srgbClr val="0F172A"/>
-                          </a:solidFill>
-                        </a:rPr>
-                        <a:t>Release gate</a:t>
-                      </a:r>
-                      <a:endParaRPr lang="en-US" sz="1350"/>
-                    </a:p>
-                  </a:txBody>
-                  <a:tcPr>
-                    <a:solidFill>
-                      <a:srgbClr val="FFFFFF"/>
-                    </a:solidFill>
-                  </a:tcPr>
-                </a:tc>
-                <a:tc>
-                  <a:txBody>
-                    <a:bodyPr/>
-                    <a:lstStyle/>
-                    <a:p>
-                      <a:r>
-                        <a:rPr lang="en-US" sz="1350" b="0">
-                          <a:solidFill>
-                            <a:srgbClr val="0F172A"/>
-                          </a:solidFill>
-                        </a:rPr>
-                        <a:t>Open</a:t>
-                      </a:r>
-                      <a:endParaRPr lang="en-US" sz="1350"/>
-                    </a:p>
-                  </a:txBody>
-                  <a:tcPr>
-                    <a:solidFill>
-                      <a:srgbClr val="FFFFFF"/>
-                    </a:solidFill>
-                  </a:tcPr>
-                </a:tc>
-                <a:tc>
-                  <a:txBody>
-                    <a:bodyPr/>
-                    <a:lstStyle/>
-                    <a:p>
-                      <a:r>
-                        <a:rPr lang="en-US" sz="1350" b="0">
-                          <a:solidFill>
-                            <a:srgbClr val="0F172A"/>
-                          </a:solidFill>
-                        </a:rPr>
-                        <a:t>Clear</a:t>
-                      </a:r>
-                      <a:endParaRPr lang="en-US" sz="1350"/>
-                    </a:p>
-                  </a:txBody>
-                  <a:tcPr>
-                    <a:solidFill>
-                      <a:srgbClr val="FFFFFF"/>
-                    </a:solidFill>
-                  </a:tcPr>
-                </a:tc>
-                <a:tc>
-                  <a:txBody>
-                    <a:bodyPr/>
-                    <a:lstStyle/>
-                    <a:p>
-                      <a:r>
-                        <a:rPr lang="en-US" sz="1350" b="0">
-                          <a:solidFill>
-                            <a:srgbClr val="0F172A"/>
-                          </a:solidFill>
-                        </a:rPr>
-                        <a:t>—</a:t>
-                      </a:r>
-                      <a:endParaRPr lang="en-US" sz="1350"/>
-                    </a:p>
-                  </a:txBody>
-                  <a:tcPr>
-                    <a:solidFill>
-                      <a:srgbClr val="FFFFFF"/>
-                    </a:solidFill>
-                  </a:tcPr>
-                </a:tc>
-              </a:tr>
-            </a:tbl>
-          </a:graphicData>
-        </a:graphic>
-      </p:graphicFrame>
-      <p:sp>
-        <p:nvSpPr>
-          <p:cNvPr id="9" name="table-note-label"/>
-          <p:cNvSpPr txBox="1"/>
-          <p:nvPr/>
-        </p:nvSpPr>
-        <p:spPr>
-          <a:xfrm xmlns:a="http://schemas.openxmlformats.org/drawingml/2006/main">
-            <a:off x="9810750" y="3314700"/>
-            <a:ext cx="3429000" cy="228600"/>
+      <p:sp>
+        <p:nvSpPr>
+          <p:cNvPr id="8" name="timeline-label"/>
+          <p:cNvSpPr txBox="1"/>
+          <p:nvPr/>
+        </p:nvSpPr>
+        <p:spPr>
+          <a:xfrm xmlns:a="http://schemas.openxmlformats.org/drawingml/2006/main">
+            <a:off x="1066800" y="3238500"/>
+            <a:ext cx="4000500" cy="228600"/>
           </a:xfrm>
           <a:prstGeom xmlns:a="http://schemas.openxmlformats.org/drawingml/2006/main" prst="rect">
             <a:avLst/>
@@ -2285,65 +1809,28 @@
                 <a:latin typeface="Arial"/>
                 <a:ea typeface="Arial"/>
               </a:rPr>
-              <a:t>MODEL READ-THROUGH</a:t>
-            </a:r>
-            <a:endParaRPr lang="en-US"/>
-          </a:p>
-        </p:txBody>
-      </p:sp>
-      <p:sp>
-        <p:nvSpPr>
-          <p:cNvPr id="10" name="table-note-title"/>
-          <p:cNvSpPr txBox="1"/>
-          <p:nvPr/>
-        </p:nvSpPr>
-        <p:spPr>
-          <a:xfrm xmlns:a="http://schemas.openxmlformats.org/drawingml/2006/main">
-            <a:off x="9810750" y="3790950"/>
-            <a:ext cx="3619500" cy="819150"/>
-          </a:xfrm>
-          <a:prstGeom xmlns:a="http://schemas.openxmlformats.org/drawingml/2006/main" prst="rect">
-            <a:avLst/>
-          </a:prstGeom>
-          <a:noFill xmlns:a="http://schemas.openxmlformats.org/drawingml/2006/main"/>
-          <a:ln xmlns:a="http://schemas.openxmlformats.org/drawingml/2006/main" w="0">
-            <a:noFill/>
-          </a:ln>
-        </p:spPr>
-        <p:txBody>
-          <a:bodyPr xmlns:a="http://schemas.openxmlformats.org/drawingml/2006/main" wrap="square" lIns="0" tIns="0" rIns="0" bIns="0" anchor="t"/>
-          <a:lstStyle xmlns:a="http://schemas.openxmlformats.org/drawingml/2006/main"/>
-          <a:p xmlns:a="http://schemas.openxmlformats.org/drawingml/2006/main">
-            <a:r>
-              <a:rPr lang="en-US" sz="2100" b="1">
-                <a:solidFill>
-                  <a:srgbClr val="17191A"/>
-                </a:solidFill>
-                <a:latin typeface="Arial"/>
-                <a:ea typeface="Arial"/>
-              </a:rPr>
-              <a:t>The gate stays visible beside the number.</a:t>
-            </a:r>
-            <a:endParaRPr lang="en-US"/>
-          </a:p>
-        </p:txBody>
-      </p:sp>
-      <p:sp>
-        <p:nvSpPr>
-          <p:cNvPr id="11" name="table-note-rule"/>
+              <a:t>EVOLUTION / TRANSITION</a:t>
+            </a:r>
+            <a:endParaRPr lang="en-US"/>
+          </a:p>
+        </p:txBody>
+      </p:sp>
+      <p:sp>
+        <p:nvSpPr>
+          <p:cNvPr id="9" name="timeline-axis"/>
           <p:cNvSpPr/>
           <p:nvPr/>
         </p:nvSpPr>
         <p:spPr>
           <a:xfrm xmlns:a="http://schemas.openxmlformats.org/drawingml/2006/main">
-            <a:off x="9810750" y="5010150"/>
-            <a:ext cx="3619500" cy="0"/>
+            <a:off x="1219200" y="4762500"/>
+            <a:ext cx="10287000" cy="0"/>
           </a:xfrm>
           <a:prstGeom xmlns:a="http://schemas.openxmlformats.org/drawingml/2006/main" prst="line">
             <a:avLst/>
           </a:prstGeom>
           <a:noFill xmlns:a="http://schemas.openxmlformats.org/drawingml/2006/main"/>
-          <a:ln xmlns:a="http://schemas.openxmlformats.org/drawingml/2006/main" w="12700">
+          <a:ln xmlns:a="http://schemas.openxmlformats.org/drawingml/2006/main" w="38100">
             <a:solidFill>
               <a:srgbClr val="898883"/>
             </a:solidFill>
@@ -2364,44 +1851,831 @@
       </p:sp>
       <p:sp>
         <p:nvSpPr>
-          <p:cNvPr id="12" name="table-note-body"/>
-          <p:cNvSpPr txBox="1"/>
-          <p:nvPr/>
-        </p:nvSpPr>
-        <p:spPr>
-          <a:xfrm xmlns:a="http://schemas.openxmlformats.org/drawingml/2006/main">
-            <a:off x="9810750" y="5276850"/>
-            <a:ext cx="3524250" cy="762000"/>
-          </a:xfrm>
-          <a:prstGeom xmlns:a="http://schemas.openxmlformats.org/drawingml/2006/main" prst="rect">
-            <a:avLst/>
-          </a:prstGeom>
-          <a:noFill xmlns:a="http://schemas.openxmlformats.org/drawingml/2006/main"/>
-          <a:ln xmlns:a="http://schemas.openxmlformats.org/drawingml/2006/main" w="0">
-            <a:noFill/>
-          </a:ln>
-        </p:spPr>
-        <p:txBody>
-          <a:bodyPr xmlns:a="http://schemas.openxmlformats.org/drawingml/2006/main" wrap="square" lIns="0" tIns="0" rIns="0" bIns="0" anchor="t"/>
-          <a:lstStyle xmlns:a="http://schemas.openxmlformats.org/drawingml/2006/main"/>
-          <a:p xmlns:a="http://schemas.openxmlformats.org/drawingml/2006/main">
-            <a:r>
-              <a:rPr lang="en-US" sz="1275">
+          <p:cNvPr id="10" name="timeline-node-0"/>
+          <p:cNvSpPr/>
+          <p:nvPr/>
+        </p:nvSpPr>
+        <p:spPr>
+          <a:xfrm xmlns:a="http://schemas.openxmlformats.org/drawingml/2006/main">
+            <a:off x="1066800" y="4610100"/>
+            <a:ext cx="304800" cy="304800"/>
+          </a:xfrm>
+          <a:prstGeom xmlns:a="http://schemas.openxmlformats.org/drawingml/2006/main" prst="ellipse">
+            <a:avLst/>
+          </a:prstGeom>
+          <a:solidFill xmlns:a="http://schemas.openxmlformats.org/drawingml/2006/main">
+            <a:srgbClr val="F3EFE3"/>
+          </a:solidFill>
+          <a:ln xmlns:a="http://schemas.openxmlformats.org/drawingml/2006/main" w="25400">
+            <a:solidFill>
+              <a:srgbClr val="17191A"/>
+            </a:solidFill>
+            <a:prstDash val="solid"/>
+          </a:ln>
+        </p:spPr>
+        <p:txBody>
+          <a:bodyPr xmlns:a="http://schemas.openxmlformats.org/drawingml/2006/main" wrap="square" lIns="0" tIns="0" rIns="0" bIns="0" anchor="t"/>
+          <a:lstStyle xmlns:a="http://schemas.openxmlformats.org/drawingml/2006/main"/>
+          <a:p xmlns:a="http://schemas.openxmlformats.org/drawingml/2006/main">
+            <a:r>
+              <a:rPr lang="en-US"/>
+              <a:t/>
+            </a:r>
+            <a:endParaRPr lang="en-US"/>
+          </a:p>
+        </p:txBody>
+      </p:sp>
+      <p:sp>
+        <p:nvSpPr>
+          <p:cNvPr id="11" name="timeline-number-0"/>
+          <p:cNvSpPr txBox="1"/>
+          <p:nvPr/>
+        </p:nvSpPr>
+        <p:spPr>
+          <a:xfrm xmlns:a="http://schemas.openxmlformats.org/drawingml/2006/main">
+            <a:off x="952500" y="4076700"/>
+            <a:ext cx="533400" cy="190500"/>
+          </a:xfrm>
+          <a:prstGeom xmlns:a="http://schemas.openxmlformats.org/drawingml/2006/main" prst="rect">
+            <a:avLst/>
+          </a:prstGeom>
+          <a:noFill xmlns:a="http://schemas.openxmlformats.org/drawingml/2006/main"/>
+          <a:ln xmlns:a="http://schemas.openxmlformats.org/drawingml/2006/main" w="0">
+            <a:noFill/>
+          </a:ln>
+        </p:spPr>
+        <p:txBody>
+          <a:bodyPr xmlns:a="http://schemas.openxmlformats.org/drawingml/2006/main" wrap="square" lIns="0" tIns="0" rIns="0" bIns="0" anchor="t"/>
+          <a:lstStyle xmlns:a="http://schemas.openxmlformats.org/drawingml/2006/main"/>
+          <a:p xmlns:a="http://schemas.openxmlformats.org/drawingml/2006/main">
+            <a:pPr algn="ctr"/>
+            <a:r>
+              <a:rPr lang="en-US" sz="975" b="1">
+                <a:solidFill>
+                  <a:srgbClr val="2B64B0"/>
+                </a:solidFill>
+                <a:latin typeface="Arial"/>
+                <a:ea typeface="Arial"/>
+              </a:rPr>
+              <a:t>01</a:t>
+            </a:r>
+            <a:endParaRPr lang="en-US"/>
+          </a:p>
+        </p:txBody>
+      </p:sp>
+      <p:sp>
+        <p:nvSpPr>
+          <p:cNvPr id="12" name="timeline-label-0"/>
+          <p:cNvSpPr txBox="1"/>
+          <p:nvPr/>
+        </p:nvSpPr>
+        <p:spPr>
+          <a:xfrm xmlns:a="http://schemas.openxmlformats.org/drawingml/2006/main">
+            <a:off x="533400" y="5086350"/>
+            <a:ext cx="1371600" cy="228600"/>
+          </a:xfrm>
+          <a:prstGeom xmlns:a="http://schemas.openxmlformats.org/drawingml/2006/main" prst="rect">
+            <a:avLst/>
+          </a:prstGeom>
+          <a:noFill xmlns:a="http://schemas.openxmlformats.org/drawingml/2006/main"/>
+          <a:ln xmlns:a="http://schemas.openxmlformats.org/drawingml/2006/main" w="0">
+            <a:noFill/>
+          </a:ln>
+        </p:spPr>
+        <p:txBody>
+          <a:bodyPr xmlns:a="http://schemas.openxmlformats.org/drawingml/2006/main" wrap="square" lIns="0" tIns="0" rIns="0" bIns="0" anchor="t"/>
+          <a:lstStyle xmlns:a="http://schemas.openxmlformats.org/drawingml/2006/main"/>
+          <a:p xmlns:a="http://schemas.openxmlformats.org/drawingml/2006/main">
+            <a:pPr algn="ctr"/>
+            <a:r>
+              <a:rPr lang="en-US" sz="1350" b="1">
+                <a:solidFill>
+                  <a:srgbClr val="17191A"/>
+                </a:solidFill>
+                <a:latin typeface="Arial"/>
+                <a:ea typeface="Arial"/>
+              </a:rPr>
+              <a:t>Frame</a:t>
+            </a:r>
+            <a:endParaRPr lang="en-US"/>
+          </a:p>
+        </p:txBody>
+      </p:sp>
+      <p:sp>
+        <p:nvSpPr>
+          <p:cNvPr id="13" name="timeline-text-0"/>
+          <p:cNvSpPr txBox="1"/>
+          <p:nvPr/>
+        </p:nvSpPr>
+        <p:spPr>
+          <a:xfrm xmlns:a="http://schemas.openxmlformats.org/drawingml/2006/main">
+            <a:off x="323850" y="5391150"/>
+            <a:ext cx="1790700" cy="361950"/>
+          </a:xfrm>
+          <a:prstGeom xmlns:a="http://schemas.openxmlformats.org/drawingml/2006/main" prst="rect">
+            <a:avLst/>
+          </a:prstGeom>
+          <a:noFill xmlns:a="http://schemas.openxmlformats.org/drawingml/2006/main"/>
+          <a:ln xmlns:a="http://schemas.openxmlformats.org/drawingml/2006/main" w="0">
+            <a:noFill/>
+          </a:ln>
+        </p:spPr>
+        <p:txBody>
+          <a:bodyPr xmlns:a="http://schemas.openxmlformats.org/drawingml/2006/main" wrap="square" lIns="0" tIns="0" rIns="0" bIns="0" anchor="t"/>
+          <a:lstStyle xmlns:a="http://schemas.openxmlformats.org/drawingml/2006/main"/>
+          <a:p xmlns:a="http://schemas.openxmlformats.org/drawingml/2006/main">
+            <a:pPr algn="ctr"/>
+            <a:r>
+              <a:rPr lang="en-US" sz="1050">
                 <a:solidFill>
                   <a:srgbClr val="898883"/>
                 </a:solidFill>
                 <a:latin typeface="Arial"/>
                 <a:ea typeface="Arial"/>
               </a:rPr>
-              <a:t>Use a table when assumptions and units carry the decision. Charts support the ledger; they do not replace it.</a:t>
-            </a:r>
-            <a:endParaRPr lang="en-US"/>
-          </a:p>
-        </p:txBody>
-      </p:sp>
-      <p:sp>
-        <p:nvSpPr>
-          <p:cNvPr id="13" name="evidence-band"/>
+              <a:t>Name the question</a:t>
+            </a:r>
+            <a:endParaRPr lang="en-US"/>
+          </a:p>
+        </p:txBody>
+      </p:sp>
+      <p:sp>
+        <p:nvSpPr>
+          <p:cNvPr id="14" name="timeline-node-1"/>
+          <p:cNvSpPr/>
+          <p:nvPr/>
+        </p:nvSpPr>
+        <p:spPr>
+          <a:xfrm xmlns:a="http://schemas.openxmlformats.org/drawingml/2006/main">
+            <a:off x="3638550" y="4610100"/>
+            <a:ext cx="304800" cy="304800"/>
+          </a:xfrm>
+          <a:prstGeom xmlns:a="http://schemas.openxmlformats.org/drawingml/2006/main" prst="ellipse">
+            <a:avLst/>
+          </a:prstGeom>
+          <a:solidFill xmlns:a="http://schemas.openxmlformats.org/drawingml/2006/main">
+            <a:srgbClr val="F3EFE3"/>
+          </a:solidFill>
+          <a:ln xmlns:a="http://schemas.openxmlformats.org/drawingml/2006/main" w="25400">
+            <a:solidFill>
+              <a:srgbClr val="17191A"/>
+            </a:solidFill>
+            <a:prstDash val="solid"/>
+          </a:ln>
+        </p:spPr>
+        <p:txBody>
+          <a:bodyPr xmlns:a="http://schemas.openxmlformats.org/drawingml/2006/main" wrap="square" lIns="0" tIns="0" rIns="0" bIns="0" anchor="t"/>
+          <a:lstStyle xmlns:a="http://schemas.openxmlformats.org/drawingml/2006/main"/>
+          <a:p xmlns:a="http://schemas.openxmlformats.org/drawingml/2006/main">
+            <a:r>
+              <a:rPr lang="en-US"/>
+              <a:t/>
+            </a:r>
+            <a:endParaRPr lang="en-US"/>
+          </a:p>
+        </p:txBody>
+      </p:sp>
+      <p:sp>
+        <p:nvSpPr>
+          <p:cNvPr id="15" name="timeline-number-1"/>
+          <p:cNvSpPr txBox="1"/>
+          <p:nvPr/>
+        </p:nvSpPr>
+        <p:spPr>
+          <a:xfrm xmlns:a="http://schemas.openxmlformats.org/drawingml/2006/main">
+            <a:off x="3524250" y="4076700"/>
+            <a:ext cx="533400" cy="190500"/>
+          </a:xfrm>
+          <a:prstGeom xmlns:a="http://schemas.openxmlformats.org/drawingml/2006/main" prst="rect">
+            <a:avLst/>
+          </a:prstGeom>
+          <a:noFill xmlns:a="http://schemas.openxmlformats.org/drawingml/2006/main"/>
+          <a:ln xmlns:a="http://schemas.openxmlformats.org/drawingml/2006/main" w="0">
+            <a:noFill/>
+          </a:ln>
+        </p:spPr>
+        <p:txBody>
+          <a:bodyPr xmlns:a="http://schemas.openxmlformats.org/drawingml/2006/main" wrap="square" lIns="0" tIns="0" rIns="0" bIns="0" anchor="t"/>
+          <a:lstStyle xmlns:a="http://schemas.openxmlformats.org/drawingml/2006/main"/>
+          <a:p xmlns:a="http://schemas.openxmlformats.org/drawingml/2006/main">
+            <a:pPr algn="ctr"/>
+            <a:r>
+              <a:rPr lang="en-US" sz="975" b="1">
+                <a:solidFill>
+                  <a:srgbClr val="2B64B0"/>
+                </a:solidFill>
+                <a:latin typeface="Arial"/>
+                <a:ea typeface="Arial"/>
+              </a:rPr>
+              <a:t>02</a:t>
+            </a:r>
+            <a:endParaRPr lang="en-US"/>
+          </a:p>
+        </p:txBody>
+      </p:sp>
+      <p:sp>
+        <p:nvSpPr>
+          <p:cNvPr id="16" name="timeline-label-1"/>
+          <p:cNvSpPr txBox="1"/>
+          <p:nvPr/>
+        </p:nvSpPr>
+        <p:spPr>
+          <a:xfrm xmlns:a="http://schemas.openxmlformats.org/drawingml/2006/main">
+            <a:off x="3105150" y="5086350"/>
+            <a:ext cx="1371600" cy="228600"/>
+          </a:xfrm>
+          <a:prstGeom xmlns:a="http://schemas.openxmlformats.org/drawingml/2006/main" prst="rect">
+            <a:avLst/>
+          </a:prstGeom>
+          <a:noFill xmlns:a="http://schemas.openxmlformats.org/drawingml/2006/main"/>
+          <a:ln xmlns:a="http://schemas.openxmlformats.org/drawingml/2006/main" w="0">
+            <a:noFill/>
+          </a:ln>
+        </p:spPr>
+        <p:txBody>
+          <a:bodyPr xmlns:a="http://schemas.openxmlformats.org/drawingml/2006/main" wrap="square" lIns="0" tIns="0" rIns="0" bIns="0" anchor="t"/>
+          <a:lstStyle xmlns:a="http://schemas.openxmlformats.org/drawingml/2006/main"/>
+          <a:p xmlns:a="http://schemas.openxmlformats.org/drawingml/2006/main">
+            <a:pPr algn="ctr"/>
+            <a:r>
+              <a:rPr lang="en-US" sz="1350" b="1">
+                <a:solidFill>
+                  <a:srgbClr val="17191A"/>
+                </a:solidFill>
+                <a:latin typeface="Arial"/>
+                <a:ea typeface="Arial"/>
+              </a:rPr>
+              <a:t>Test</a:t>
+            </a:r>
+            <a:endParaRPr lang="en-US"/>
+          </a:p>
+        </p:txBody>
+      </p:sp>
+      <p:sp>
+        <p:nvSpPr>
+          <p:cNvPr id="17" name="timeline-text-1"/>
+          <p:cNvSpPr txBox="1"/>
+          <p:nvPr/>
+        </p:nvSpPr>
+        <p:spPr>
+          <a:xfrm xmlns:a="http://schemas.openxmlformats.org/drawingml/2006/main">
+            <a:off x="2895600" y="5391150"/>
+            <a:ext cx="1790700" cy="361950"/>
+          </a:xfrm>
+          <a:prstGeom xmlns:a="http://schemas.openxmlformats.org/drawingml/2006/main" prst="rect">
+            <a:avLst/>
+          </a:prstGeom>
+          <a:noFill xmlns:a="http://schemas.openxmlformats.org/drawingml/2006/main"/>
+          <a:ln xmlns:a="http://schemas.openxmlformats.org/drawingml/2006/main" w="0">
+            <a:noFill/>
+          </a:ln>
+        </p:spPr>
+        <p:txBody>
+          <a:bodyPr xmlns:a="http://schemas.openxmlformats.org/drawingml/2006/main" wrap="square" lIns="0" tIns="0" rIns="0" bIns="0" anchor="t"/>
+          <a:lstStyle xmlns:a="http://schemas.openxmlformats.org/drawingml/2006/main"/>
+          <a:p xmlns:a="http://schemas.openxmlformats.org/drawingml/2006/main">
+            <a:pPr algn="ctr"/>
+            <a:r>
+              <a:rPr lang="en-US" sz="1050">
+                <a:solidFill>
+                  <a:srgbClr val="898883"/>
+                </a:solidFill>
+                <a:latin typeface="Arial"/>
+                <a:ea typeface="Arial"/>
+              </a:rPr>
+              <a:t>Hold the rule</a:t>
+            </a:r>
+            <a:endParaRPr lang="en-US"/>
+          </a:p>
+        </p:txBody>
+      </p:sp>
+      <p:sp>
+        <p:nvSpPr>
+          <p:cNvPr id="18" name="timeline-node-2"/>
+          <p:cNvSpPr/>
+          <p:nvPr/>
+        </p:nvSpPr>
+        <p:spPr>
+          <a:xfrm xmlns:a="http://schemas.openxmlformats.org/drawingml/2006/main">
+            <a:off x="6210300" y="4610100"/>
+            <a:ext cx="304800" cy="304800"/>
+          </a:xfrm>
+          <a:prstGeom xmlns:a="http://schemas.openxmlformats.org/drawingml/2006/main" prst="ellipse">
+            <a:avLst/>
+          </a:prstGeom>
+          <a:solidFill xmlns:a="http://schemas.openxmlformats.org/drawingml/2006/main">
+            <a:srgbClr val="F3EFE3"/>
+          </a:solidFill>
+          <a:ln xmlns:a="http://schemas.openxmlformats.org/drawingml/2006/main" w="25400">
+            <a:solidFill>
+              <a:srgbClr val="17191A"/>
+            </a:solidFill>
+            <a:prstDash val="solid"/>
+          </a:ln>
+        </p:spPr>
+        <p:txBody>
+          <a:bodyPr xmlns:a="http://schemas.openxmlformats.org/drawingml/2006/main" wrap="square" lIns="0" tIns="0" rIns="0" bIns="0" anchor="t"/>
+          <a:lstStyle xmlns:a="http://schemas.openxmlformats.org/drawingml/2006/main"/>
+          <a:p xmlns:a="http://schemas.openxmlformats.org/drawingml/2006/main">
+            <a:r>
+              <a:rPr lang="en-US"/>
+              <a:t/>
+            </a:r>
+            <a:endParaRPr lang="en-US"/>
+          </a:p>
+        </p:txBody>
+      </p:sp>
+      <p:sp>
+        <p:nvSpPr>
+          <p:cNvPr id="19" name="timeline-number-2"/>
+          <p:cNvSpPr txBox="1"/>
+          <p:nvPr/>
+        </p:nvSpPr>
+        <p:spPr>
+          <a:xfrm xmlns:a="http://schemas.openxmlformats.org/drawingml/2006/main">
+            <a:off x="6096000" y="4076700"/>
+            <a:ext cx="533400" cy="190500"/>
+          </a:xfrm>
+          <a:prstGeom xmlns:a="http://schemas.openxmlformats.org/drawingml/2006/main" prst="rect">
+            <a:avLst/>
+          </a:prstGeom>
+          <a:noFill xmlns:a="http://schemas.openxmlformats.org/drawingml/2006/main"/>
+          <a:ln xmlns:a="http://schemas.openxmlformats.org/drawingml/2006/main" w="0">
+            <a:noFill/>
+          </a:ln>
+        </p:spPr>
+        <p:txBody>
+          <a:bodyPr xmlns:a="http://schemas.openxmlformats.org/drawingml/2006/main" wrap="square" lIns="0" tIns="0" rIns="0" bIns="0" anchor="t"/>
+          <a:lstStyle xmlns:a="http://schemas.openxmlformats.org/drawingml/2006/main"/>
+          <a:p xmlns:a="http://schemas.openxmlformats.org/drawingml/2006/main">
+            <a:pPr algn="ctr"/>
+            <a:r>
+              <a:rPr lang="en-US" sz="975" b="1">
+                <a:solidFill>
+                  <a:srgbClr val="2B64B0"/>
+                </a:solidFill>
+                <a:latin typeface="Arial"/>
+                <a:ea typeface="Arial"/>
+              </a:rPr>
+              <a:t>03</a:t>
+            </a:r>
+            <a:endParaRPr lang="en-US"/>
+          </a:p>
+        </p:txBody>
+      </p:sp>
+      <p:sp>
+        <p:nvSpPr>
+          <p:cNvPr id="20" name="timeline-label-2"/>
+          <p:cNvSpPr txBox="1"/>
+          <p:nvPr/>
+        </p:nvSpPr>
+        <p:spPr>
+          <a:xfrm xmlns:a="http://schemas.openxmlformats.org/drawingml/2006/main">
+            <a:off x="5676900" y="5086350"/>
+            <a:ext cx="1371600" cy="228600"/>
+          </a:xfrm>
+          <a:prstGeom xmlns:a="http://schemas.openxmlformats.org/drawingml/2006/main" prst="rect">
+            <a:avLst/>
+          </a:prstGeom>
+          <a:noFill xmlns:a="http://schemas.openxmlformats.org/drawingml/2006/main"/>
+          <a:ln xmlns:a="http://schemas.openxmlformats.org/drawingml/2006/main" w="0">
+            <a:noFill/>
+          </a:ln>
+        </p:spPr>
+        <p:txBody>
+          <a:bodyPr xmlns:a="http://schemas.openxmlformats.org/drawingml/2006/main" wrap="square" lIns="0" tIns="0" rIns="0" bIns="0" anchor="t"/>
+          <a:lstStyle xmlns:a="http://schemas.openxmlformats.org/drawingml/2006/main"/>
+          <a:p xmlns:a="http://schemas.openxmlformats.org/drawingml/2006/main">
+            <a:pPr algn="ctr"/>
+            <a:r>
+              <a:rPr lang="en-US" sz="1350" b="1">
+                <a:solidFill>
+                  <a:srgbClr val="17191A"/>
+                </a:solidFill>
+                <a:latin typeface="Arial"/>
+                <a:ea typeface="Arial"/>
+              </a:rPr>
+              <a:t>Read</a:t>
+            </a:r>
+            <a:endParaRPr lang="en-US"/>
+          </a:p>
+        </p:txBody>
+      </p:sp>
+      <p:sp>
+        <p:nvSpPr>
+          <p:cNvPr id="21" name="timeline-text-2"/>
+          <p:cNvSpPr txBox="1"/>
+          <p:nvPr/>
+        </p:nvSpPr>
+        <p:spPr>
+          <a:xfrm xmlns:a="http://schemas.openxmlformats.org/drawingml/2006/main">
+            <a:off x="5467350" y="5391150"/>
+            <a:ext cx="1790700" cy="361950"/>
+          </a:xfrm>
+          <a:prstGeom xmlns:a="http://schemas.openxmlformats.org/drawingml/2006/main" prst="rect">
+            <a:avLst/>
+          </a:prstGeom>
+          <a:noFill xmlns:a="http://schemas.openxmlformats.org/drawingml/2006/main"/>
+          <a:ln xmlns:a="http://schemas.openxmlformats.org/drawingml/2006/main" w="0">
+            <a:noFill/>
+          </a:ln>
+        </p:spPr>
+        <p:txBody>
+          <a:bodyPr xmlns:a="http://schemas.openxmlformats.org/drawingml/2006/main" wrap="square" lIns="0" tIns="0" rIns="0" bIns="0" anchor="t"/>
+          <a:lstStyle xmlns:a="http://schemas.openxmlformats.org/drawingml/2006/main"/>
+          <a:p xmlns:a="http://schemas.openxmlformats.org/drawingml/2006/main">
+            <a:pPr algn="ctr"/>
+            <a:r>
+              <a:rPr lang="en-US" sz="1050">
+                <a:solidFill>
+                  <a:srgbClr val="898883"/>
+                </a:solidFill>
+                <a:latin typeface="Arial"/>
+                <a:ea typeface="Arial"/>
+              </a:rPr>
+              <a:t>Separate signal</a:t>
+            </a:r>
+            <a:endParaRPr lang="en-US"/>
+          </a:p>
+        </p:txBody>
+      </p:sp>
+      <p:sp>
+        <p:nvSpPr>
+          <p:cNvPr id="22" name="timeline-node-3"/>
+          <p:cNvSpPr/>
+          <p:nvPr/>
+        </p:nvSpPr>
+        <p:spPr>
+          <a:xfrm xmlns:a="http://schemas.openxmlformats.org/drawingml/2006/main">
+            <a:off x="8782050" y="4610100"/>
+            <a:ext cx="304800" cy="304800"/>
+          </a:xfrm>
+          <a:prstGeom xmlns:a="http://schemas.openxmlformats.org/drawingml/2006/main" prst="ellipse">
+            <a:avLst/>
+          </a:prstGeom>
+          <a:solidFill xmlns:a="http://schemas.openxmlformats.org/drawingml/2006/main">
+            <a:srgbClr val="F3EFE3"/>
+          </a:solidFill>
+          <a:ln xmlns:a="http://schemas.openxmlformats.org/drawingml/2006/main" w="25400">
+            <a:solidFill>
+              <a:srgbClr val="17191A"/>
+            </a:solidFill>
+            <a:prstDash val="solid"/>
+          </a:ln>
+        </p:spPr>
+        <p:txBody>
+          <a:bodyPr xmlns:a="http://schemas.openxmlformats.org/drawingml/2006/main" wrap="square" lIns="0" tIns="0" rIns="0" bIns="0" anchor="t"/>
+          <a:lstStyle xmlns:a="http://schemas.openxmlformats.org/drawingml/2006/main"/>
+          <a:p xmlns:a="http://schemas.openxmlformats.org/drawingml/2006/main">
+            <a:r>
+              <a:rPr lang="en-US"/>
+              <a:t/>
+            </a:r>
+            <a:endParaRPr lang="en-US"/>
+          </a:p>
+        </p:txBody>
+      </p:sp>
+      <p:sp>
+        <p:nvSpPr>
+          <p:cNvPr id="23" name="timeline-number-3"/>
+          <p:cNvSpPr txBox="1"/>
+          <p:nvPr/>
+        </p:nvSpPr>
+        <p:spPr>
+          <a:xfrm xmlns:a="http://schemas.openxmlformats.org/drawingml/2006/main">
+            <a:off x="8667750" y="4076700"/>
+            <a:ext cx="533400" cy="190500"/>
+          </a:xfrm>
+          <a:prstGeom xmlns:a="http://schemas.openxmlformats.org/drawingml/2006/main" prst="rect">
+            <a:avLst/>
+          </a:prstGeom>
+          <a:noFill xmlns:a="http://schemas.openxmlformats.org/drawingml/2006/main"/>
+          <a:ln xmlns:a="http://schemas.openxmlformats.org/drawingml/2006/main" w="0">
+            <a:noFill/>
+          </a:ln>
+        </p:spPr>
+        <p:txBody>
+          <a:bodyPr xmlns:a="http://schemas.openxmlformats.org/drawingml/2006/main" wrap="square" lIns="0" tIns="0" rIns="0" bIns="0" anchor="t"/>
+          <a:lstStyle xmlns:a="http://schemas.openxmlformats.org/drawingml/2006/main"/>
+          <a:p xmlns:a="http://schemas.openxmlformats.org/drawingml/2006/main">
+            <a:pPr algn="ctr"/>
+            <a:r>
+              <a:rPr lang="en-US" sz="975" b="1">
+                <a:solidFill>
+                  <a:srgbClr val="2B64B0"/>
+                </a:solidFill>
+                <a:latin typeface="Arial"/>
+                <a:ea typeface="Arial"/>
+              </a:rPr>
+              <a:t>04</a:t>
+            </a:r>
+            <a:endParaRPr lang="en-US"/>
+          </a:p>
+        </p:txBody>
+      </p:sp>
+      <p:sp>
+        <p:nvSpPr>
+          <p:cNvPr id="24" name="timeline-label-3"/>
+          <p:cNvSpPr txBox="1"/>
+          <p:nvPr/>
+        </p:nvSpPr>
+        <p:spPr>
+          <a:xfrm xmlns:a="http://schemas.openxmlformats.org/drawingml/2006/main">
+            <a:off x="8248650" y="5086350"/>
+            <a:ext cx="1371600" cy="228600"/>
+          </a:xfrm>
+          <a:prstGeom xmlns:a="http://schemas.openxmlformats.org/drawingml/2006/main" prst="rect">
+            <a:avLst/>
+          </a:prstGeom>
+          <a:noFill xmlns:a="http://schemas.openxmlformats.org/drawingml/2006/main"/>
+          <a:ln xmlns:a="http://schemas.openxmlformats.org/drawingml/2006/main" w="0">
+            <a:noFill/>
+          </a:ln>
+        </p:spPr>
+        <p:txBody>
+          <a:bodyPr xmlns:a="http://schemas.openxmlformats.org/drawingml/2006/main" wrap="square" lIns="0" tIns="0" rIns="0" bIns="0" anchor="t"/>
+          <a:lstStyle xmlns:a="http://schemas.openxmlformats.org/drawingml/2006/main"/>
+          <a:p xmlns:a="http://schemas.openxmlformats.org/drawingml/2006/main">
+            <a:pPr algn="ctr"/>
+            <a:r>
+              <a:rPr lang="en-US" sz="1350" b="1">
+                <a:solidFill>
+                  <a:srgbClr val="17191A"/>
+                </a:solidFill>
+                <a:latin typeface="Arial"/>
+                <a:ea typeface="Arial"/>
+              </a:rPr>
+              <a:t>Move</a:t>
+            </a:r>
+            <a:endParaRPr lang="en-US"/>
+          </a:p>
+        </p:txBody>
+      </p:sp>
+      <p:sp>
+        <p:nvSpPr>
+          <p:cNvPr id="25" name="timeline-text-3"/>
+          <p:cNvSpPr txBox="1"/>
+          <p:nvPr/>
+        </p:nvSpPr>
+        <p:spPr>
+          <a:xfrm xmlns:a="http://schemas.openxmlformats.org/drawingml/2006/main">
+            <a:off x="8039100" y="5391150"/>
+            <a:ext cx="1790700" cy="361950"/>
+          </a:xfrm>
+          <a:prstGeom xmlns:a="http://schemas.openxmlformats.org/drawingml/2006/main" prst="rect">
+            <a:avLst/>
+          </a:prstGeom>
+          <a:noFill xmlns:a="http://schemas.openxmlformats.org/drawingml/2006/main"/>
+          <a:ln xmlns:a="http://schemas.openxmlformats.org/drawingml/2006/main" w="0">
+            <a:noFill/>
+          </a:ln>
+        </p:spPr>
+        <p:txBody>
+          <a:bodyPr xmlns:a="http://schemas.openxmlformats.org/drawingml/2006/main" wrap="square" lIns="0" tIns="0" rIns="0" bIns="0" anchor="t"/>
+          <a:lstStyle xmlns:a="http://schemas.openxmlformats.org/drawingml/2006/main"/>
+          <a:p xmlns:a="http://schemas.openxmlformats.org/drawingml/2006/main">
+            <a:pPr algn="ctr"/>
+            <a:r>
+              <a:rPr lang="en-US" sz="1050">
+                <a:solidFill>
+                  <a:srgbClr val="898883"/>
+                </a:solidFill>
+                <a:latin typeface="Arial"/>
+                <a:ea typeface="Arial"/>
+              </a:rPr>
+              <a:t>Set the next gate</a:t>
+            </a:r>
+            <a:endParaRPr lang="en-US"/>
+          </a:p>
+        </p:txBody>
+      </p:sp>
+      <p:sp>
+        <p:nvSpPr>
+          <p:cNvPr id="26" name="timeline-node-4"/>
+          <p:cNvSpPr/>
+          <p:nvPr/>
+        </p:nvSpPr>
+        <p:spPr>
+          <a:xfrm xmlns:a="http://schemas.openxmlformats.org/drawingml/2006/main">
+            <a:off x="11353800" y="4610100"/>
+            <a:ext cx="304800" cy="304800"/>
+          </a:xfrm>
+          <a:prstGeom xmlns:a="http://schemas.openxmlformats.org/drawingml/2006/main" prst="ellipse">
+            <a:avLst/>
+          </a:prstGeom>
+          <a:solidFill xmlns:a="http://schemas.openxmlformats.org/drawingml/2006/main">
+            <a:srgbClr val="2B64B0"/>
+          </a:solidFill>
+          <a:ln xmlns:a="http://schemas.openxmlformats.org/drawingml/2006/main" w="25400">
+            <a:solidFill>
+              <a:srgbClr val="2B64B0"/>
+            </a:solidFill>
+            <a:prstDash val="solid"/>
+          </a:ln>
+        </p:spPr>
+        <p:txBody>
+          <a:bodyPr xmlns:a="http://schemas.openxmlformats.org/drawingml/2006/main" wrap="square" lIns="0" tIns="0" rIns="0" bIns="0" anchor="t"/>
+          <a:lstStyle xmlns:a="http://schemas.openxmlformats.org/drawingml/2006/main"/>
+          <a:p xmlns:a="http://schemas.openxmlformats.org/drawingml/2006/main">
+            <a:r>
+              <a:rPr lang="en-US"/>
+              <a:t/>
+            </a:r>
+            <a:endParaRPr lang="en-US"/>
+          </a:p>
+        </p:txBody>
+      </p:sp>
+      <p:sp>
+        <p:nvSpPr>
+          <p:cNvPr id="27" name="timeline-number-4"/>
+          <p:cNvSpPr txBox="1"/>
+          <p:nvPr/>
+        </p:nvSpPr>
+        <p:spPr>
+          <a:xfrm xmlns:a="http://schemas.openxmlformats.org/drawingml/2006/main">
+            <a:off x="11239500" y="4076700"/>
+            <a:ext cx="533400" cy="190500"/>
+          </a:xfrm>
+          <a:prstGeom xmlns:a="http://schemas.openxmlformats.org/drawingml/2006/main" prst="rect">
+            <a:avLst/>
+          </a:prstGeom>
+          <a:noFill xmlns:a="http://schemas.openxmlformats.org/drawingml/2006/main"/>
+          <a:ln xmlns:a="http://schemas.openxmlformats.org/drawingml/2006/main" w="0">
+            <a:noFill/>
+          </a:ln>
+        </p:spPr>
+        <p:txBody>
+          <a:bodyPr xmlns:a="http://schemas.openxmlformats.org/drawingml/2006/main" wrap="square" lIns="0" tIns="0" rIns="0" bIns="0" anchor="t"/>
+          <a:lstStyle xmlns:a="http://schemas.openxmlformats.org/drawingml/2006/main"/>
+          <a:p xmlns:a="http://schemas.openxmlformats.org/drawingml/2006/main">
+            <a:pPr algn="ctr"/>
+            <a:r>
+              <a:rPr lang="en-US" sz="975" b="1">
+                <a:solidFill>
+                  <a:srgbClr val="2B64B0"/>
+                </a:solidFill>
+                <a:latin typeface="Arial"/>
+                <a:ea typeface="Arial"/>
+              </a:rPr>
+              <a:t>05</a:t>
+            </a:r>
+            <a:endParaRPr lang="en-US"/>
+          </a:p>
+        </p:txBody>
+      </p:sp>
+      <p:sp>
+        <p:nvSpPr>
+          <p:cNvPr id="28" name="timeline-label-4"/>
+          <p:cNvSpPr txBox="1"/>
+          <p:nvPr/>
+        </p:nvSpPr>
+        <p:spPr>
+          <a:xfrm xmlns:a="http://schemas.openxmlformats.org/drawingml/2006/main">
+            <a:off x="10820400" y="5086350"/>
+            <a:ext cx="1371600" cy="228600"/>
+          </a:xfrm>
+          <a:prstGeom xmlns:a="http://schemas.openxmlformats.org/drawingml/2006/main" prst="rect">
+            <a:avLst/>
+          </a:prstGeom>
+          <a:noFill xmlns:a="http://schemas.openxmlformats.org/drawingml/2006/main"/>
+          <a:ln xmlns:a="http://schemas.openxmlformats.org/drawingml/2006/main" w="0">
+            <a:noFill/>
+          </a:ln>
+        </p:spPr>
+        <p:txBody>
+          <a:bodyPr xmlns:a="http://schemas.openxmlformats.org/drawingml/2006/main" wrap="square" lIns="0" tIns="0" rIns="0" bIns="0" anchor="t"/>
+          <a:lstStyle xmlns:a="http://schemas.openxmlformats.org/drawingml/2006/main"/>
+          <a:p xmlns:a="http://schemas.openxmlformats.org/drawingml/2006/main">
+            <a:pPr algn="ctr"/>
+            <a:r>
+              <a:rPr lang="en-US" sz="1350" b="1">
+                <a:solidFill>
+                  <a:srgbClr val="17191A"/>
+                </a:solidFill>
+                <a:latin typeface="Arial"/>
+                <a:ea typeface="Arial"/>
+              </a:rPr>
+              <a:t>Scale</a:t>
+            </a:r>
+            <a:endParaRPr lang="en-US"/>
+          </a:p>
+        </p:txBody>
+      </p:sp>
+      <p:sp>
+        <p:nvSpPr>
+          <p:cNvPr id="29" name="timeline-text-4"/>
+          <p:cNvSpPr txBox="1"/>
+          <p:nvPr/>
+        </p:nvSpPr>
+        <p:spPr>
+          <a:xfrm xmlns:a="http://schemas.openxmlformats.org/drawingml/2006/main">
+            <a:off x="10610850" y="5391150"/>
+            <a:ext cx="1790700" cy="361950"/>
+          </a:xfrm>
+          <a:prstGeom xmlns:a="http://schemas.openxmlformats.org/drawingml/2006/main" prst="rect">
+            <a:avLst/>
+          </a:prstGeom>
+          <a:noFill xmlns:a="http://schemas.openxmlformats.org/drawingml/2006/main"/>
+          <a:ln xmlns:a="http://schemas.openxmlformats.org/drawingml/2006/main" w="0">
+            <a:noFill/>
+          </a:ln>
+        </p:spPr>
+        <p:txBody>
+          <a:bodyPr xmlns:a="http://schemas.openxmlformats.org/drawingml/2006/main" wrap="square" lIns="0" tIns="0" rIns="0" bIns="0" anchor="t"/>
+          <a:lstStyle xmlns:a="http://schemas.openxmlformats.org/drawingml/2006/main"/>
+          <a:p xmlns:a="http://schemas.openxmlformats.org/drawingml/2006/main">
+            <a:pPr algn="ctr"/>
+            <a:r>
+              <a:rPr lang="en-US" sz="1050">
+                <a:solidFill>
+                  <a:srgbClr val="898883"/>
+                </a:solidFill>
+                <a:latin typeface="Arial"/>
+                <a:ea typeface="Arial"/>
+              </a:rPr>
+              <a:t>Repeat what held</a:t>
+            </a:r>
+            <a:endParaRPr lang="en-US"/>
+          </a:p>
+        </p:txBody>
+      </p:sp>
+      <p:sp>
+        <p:nvSpPr>
+          <p:cNvPr id="30" name="timeline-read-label"/>
+          <p:cNvSpPr txBox="1"/>
+          <p:nvPr/>
+        </p:nvSpPr>
+        <p:spPr>
+          <a:xfrm xmlns:a="http://schemas.openxmlformats.org/drawingml/2006/main">
+            <a:off x="1066800" y="6667500"/>
+            <a:ext cx="2286000" cy="209550"/>
+          </a:xfrm>
+          <a:prstGeom xmlns:a="http://schemas.openxmlformats.org/drawingml/2006/main" prst="rect">
+            <a:avLst/>
+          </a:prstGeom>
+          <a:noFill xmlns:a="http://schemas.openxmlformats.org/drawingml/2006/main"/>
+          <a:ln xmlns:a="http://schemas.openxmlformats.org/drawingml/2006/main" w="0">
+            <a:noFill/>
+          </a:ln>
+        </p:spPr>
+        <p:txBody>
+          <a:bodyPr xmlns:a="http://schemas.openxmlformats.org/drawingml/2006/main" wrap="square" lIns="0" tIns="0" rIns="0" bIns="0" anchor="t"/>
+          <a:lstStyle xmlns:a="http://schemas.openxmlformats.org/drawingml/2006/main"/>
+          <a:p xmlns:a="http://schemas.openxmlformats.org/drawingml/2006/main">
+            <a:r>
+              <a:rPr lang="en-US" sz="1050" b="1">
+                <a:solidFill>
+                  <a:srgbClr val="2B64B0"/>
+                </a:solidFill>
+                <a:latin typeface="Arial"/>
+                <a:ea typeface="Arial"/>
+              </a:rPr>
+              <a:t>READ-THROUGH</a:t>
+            </a:r>
+            <a:endParaRPr lang="en-US"/>
+          </a:p>
+        </p:txBody>
+      </p:sp>
+      <p:sp>
+        <p:nvSpPr>
+          <p:cNvPr id="31" name="timeline-read"/>
+          <p:cNvSpPr txBox="1"/>
+          <p:nvPr/>
+        </p:nvSpPr>
+        <p:spPr>
+          <a:xfrm xmlns:a="http://schemas.openxmlformats.org/drawingml/2006/main">
+            <a:off x="3333750" y="6629400"/>
+            <a:ext cx="8191500" cy="266700"/>
+          </a:xfrm>
+          <a:prstGeom xmlns:a="http://schemas.openxmlformats.org/drawingml/2006/main" prst="rect">
+            <a:avLst/>
+          </a:prstGeom>
+          <a:noFill xmlns:a="http://schemas.openxmlformats.org/drawingml/2006/main"/>
+          <a:ln xmlns:a="http://schemas.openxmlformats.org/drawingml/2006/main" w="0">
+            <a:noFill/>
+          </a:ln>
+        </p:spPr>
+        <p:txBody>
+          <a:bodyPr xmlns:a="http://schemas.openxmlformats.org/drawingml/2006/main" wrap="square" lIns="0" tIns="0" rIns="0" bIns="0" anchor="t"/>
+          <a:lstStyle xmlns:a="http://schemas.openxmlformats.org/drawingml/2006/main"/>
+          <a:p xmlns:a="http://schemas.openxmlformats.org/drawingml/2006/main">
+            <a:r>
+              <a:rPr lang="en-US" sz="1425" b="1">
+                <a:solidFill>
+                  <a:srgbClr val="17191A"/>
+                </a:solidFill>
+                <a:latin typeface="Arial"/>
+                <a:ea typeface="Arial"/>
+              </a:rPr>
+              <a:t>A sequence is useful when each handoff changes what can happen next.</a:t>
+            </a:r>
+            <a:endParaRPr lang="en-US"/>
+          </a:p>
+        </p:txBody>
+      </p:sp>
+      <p:sp>
+        <p:nvSpPr>
+          <p:cNvPr id="32" name="evidence-band"/>
           <p:cNvSpPr/>
           <p:nvPr/>
         </p:nvSpPr>
@@ -2437,7 +2711,7 @@
       </p:sp>
       <p:sp>
         <p:nvSpPr>
-          <p:cNvPr id="14" name="evidence-band-text"/>
+          <p:cNvPr id="33" name="evidence-band-text"/>
           <p:cNvSpPr txBox="1"/>
           <p:nvPr/>
         </p:nvSpPr>
@@ -2474,7 +2748,7 @@
       </p:sp>
       <p:sp>
         <p:nvSpPr>
-          <p:cNvPr id="15" name="source"/>
+          <p:cNvPr id="34" name="source"/>
           <p:cNvSpPr txBox="1"/>
           <p:nvPr/>
         </p:nvSpPr>
@@ -2511,7 +2785,7 @@
       </p:sp>
       <p:sp>
         <p:nvSpPr>
-          <p:cNvPr id="16" name="page-number"/>
+          <p:cNvPr id="35" name="page-number"/>
           <p:cNvSpPr txBox="1"/>
           <p:nvPr/>
         </p:nvSpPr>
